--- a/submission/official/C-VIRSYS-Presentation.pptx
+++ b/submission/official/C-VIRSYS-Presentation.pptx
@@ -4789,7 +4789,7 @@
                 <a:ea typeface="Microsoft YaHei"/>
                 <a:cs typeface="Arial"/>
               </a:rPr>
-              <a:t>unit, API, golden, security and Python-parity tests (vitest, 24 files)</a:t>
+              <a:t>unit, API, golden, security and reference-vector tests (vitest, 24 files)</a:t>
             </a:r>
           </a:p>
         </p:txBody>

--- a/submission/official/C-VIRSYS-Presentation.pptx
+++ b/submission/official/C-VIRSYS-Presentation.pptx
@@ -695,7 +695,7 @@
           <a:lstStyle/>
           <a:p>
             <a:r>
-              <a:t>[~0:30] Setu means bridge in Bengali/Hindi; 桥 means bridge in Chinese. One-line pitch: Setu reads a fee notice, explains it in English or 简体中文, shows the real total cost and prepares the payment — and a deterministic policy engine plus a family approver decide. Team: VIRSYS / [TEAM MEMBERS]. Source: README.md.</a:t>
+              <a:t>[~0:30] Setu means bridge in Bengali/Hindi; 桥 means bridge in Chinese. One-line pitch: Setu reads a fee notice, explains it in English or 简体中文, shows the real total cost and prepares the payment — and a deterministic policy engine plus a family approver decide. Team: VIRSYS / Mohammad Shihab Hossain (AIUB, leader), Md Mobin Chowdhury (University of Dhaka). Source: README.md.</a:t>
             </a:r>
           </a:p>
         </p:txBody>

--- a/submission/official/C-VIRSYS-Presentation.pptx
+++ b/submission/official/C-VIRSYS-Presentation.pptx
@@ -4789,7 +4789,7 @@
                 <a:ea typeface="Microsoft YaHei"/>
                 <a:cs typeface="Arial"/>
               </a:rPr>
-              <a:t>unit, API, golden, security and reference-vector tests (vitest, 24 files)</a:t>
+              <a:t>unit, API, golden, security and reference-vector tests (vitest, 24 files) · web 16/16 · Playwright 9/9</a:t>
             </a:r>
           </a:p>
         </p:txBody>
